--- a/proposal/PitchDeck5-29.pptx
+++ b/proposal/PitchDeck5-29.pptx
@@ -11636,7 +11636,7 @@
               <a:buNone/>
             </a:pPr>
             <a:r>
-              <a:rPr lang="en-US" sz="2300" b="1" dirty="0">
+              <a:rPr lang="en-US" sz="2300" b="1">
                 <a:solidFill>
                   <a:srgbClr val="FFFFFF"/>
                 </a:solidFill>
@@ -11644,7 +11644,18 @@
                 <a:ea typeface="Georgia" pitchFamily="34" charset="-122"/>
                 <a:cs typeface="Georgia" pitchFamily="34" charset="-120"/>
               </a:rPr>
-              <a:t>Transakt is the documentary credit rail for SMEs — </a:t>
+              <a:t>BlockMed </a:t>
+            </a:r>
+            <a:r>
+              <a:rPr lang="en-US" sz="2300" b="1" dirty="0">
+                <a:solidFill>
+                  <a:srgbClr val="FFFFFF"/>
+                </a:solidFill>
+                <a:latin typeface="Georgia" pitchFamily="34" charset="0"/>
+                <a:ea typeface="Georgia" pitchFamily="34" charset="-122"/>
+                <a:cs typeface="Georgia" pitchFamily="34" charset="-120"/>
+              </a:rPr>
+              <a:t>is the documentary credit rail for SMEs — </a:t>
             </a:r>
             <a:r>
               <a:rPr lang="en-US" sz="2300" b="1" dirty="0">
